--- a/try04/00_guide.pptx
+++ b/try04/00_guide.pptx
@@ -32,32 +32,32 @@
   <p:notesSz cx="6858000" cy="9144000"/>
   <p:embeddedFontLst>
     <p:embeddedFont>
-      <p:font typeface="Microsoft GothicNeo" panose="020B0500000101010101" pitchFamily="50" charset="-127"/>
+      <p:font typeface="맑은 고딕" panose="020B0503020000020004" pitchFamily="50" charset="-127"/>
       <p:regular r:id="rId20"/>
       <p:bold r:id="rId21"/>
     </p:embeddedFont>
     <p:embeddedFont>
+      <p:font typeface="Microsoft GothicNeo" panose="020B0500000101010101" pitchFamily="50" charset="-127"/>
+      <p:regular r:id="rId22"/>
+      <p:bold r:id="rId23"/>
+    </p:embeddedFont>
+    <p:embeddedFont>
       <p:font typeface="Microsoft GothicNeo Light" panose="020B0300000101010101" pitchFamily="50" charset="-127"/>
-      <p:regular r:id="rId22"/>
+      <p:regular r:id="rId24"/>
     </p:embeddedFont>
     <p:embeddedFont>
       <p:font typeface="Raleway" pitchFamily="2" charset="0"/>
-      <p:regular r:id="rId23"/>
-      <p:bold r:id="rId24"/>
-      <p:italic r:id="rId25"/>
-      <p:boldItalic r:id="rId26"/>
+      <p:regular r:id="rId25"/>
+      <p:bold r:id="rId26"/>
+      <p:italic r:id="rId27"/>
+      <p:boldItalic r:id="rId28"/>
     </p:embeddedFont>
     <p:embeddedFont>
       <p:font typeface="Verdana" panose="020B0604030504040204" pitchFamily="34" charset="0"/>
-      <p:regular r:id="rId27"/>
-      <p:bold r:id="rId28"/>
-      <p:italic r:id="rId29"/>
-      <p:boldItalic r:id="rId30"/>
-    </p:embeddedFont>
-    <p:embeddedFont>
-      <p:font typeface="맑은 고딕" panose="020B0503020000020004" pitchFamily="50" charset="-127"/>
-      <p:regular r:id="rId31"/>
-      <p:bold r:id="rId32"/>
+      <p:regular r:id="rId29"/>
+      <p:bold r:id="rId30"/>
+      <p:italic r:id="rId31"/>
+      <p:boldItalic r:id="rId32"/>
     </p:embeddedFont>
   </p:embeddedFontLst>
   <p:defaultTextStyle>
